--- a/projects/drug-information-practical/slides/ch04-randomisation-blinding.pptx
+++ b/projects/drug-information-practical/slides/ch04-randomisation-blinding.pptx
@@ -5564,7 +5564,7 @@
     <p:bg>
       <p:bgPr>
         <a:solidFill>
-          <a:srgbClr val="FFFFFF"/>
+          <a:srgbClr val="F5EDE3"/>
         </a:solidFill>
         <a:effectLst/>
       </p:bgPr>
@@ -6160,7 +6160,7 @@
     <p:bg>
       <p:bgPr>
         <a:solidFill>
-          <a:srgbClr val="FFFFFF"/>
+          <a:srgbClr val="F5EDE3"/>
         </a:solidFill>
         <a:effectLst/>
       </p:bgPr>
@@ -6436,7 +6436,7 @@
     <p:bg>
       <p:bgPr>
         <a:solidFill>
-          <a:srgbClr val="FFFFFF"/>
+          <a:srgbClr val="F5EDE3"/>
         </a:solidFill>
         <a:effectLst/>
       </p:bgPr>
@@ -6731,7 +6731,7 @@
     <p:bg>
       <p:bgPr>
         <a:solidFill>
-          <a:srgbClr val="FFFFFF"/>
+          <a:srgbClr val="F5EDE3"/>
         </a:solidFill>
         <a:effectLst/>
       </p:bgPr>
@@ -7396,7 +7396,7 @@
     <p:bg>
       <p:bgPr>
         <a:solidFill>
-          <a:srgbClr val="FFFFFF"/>
+          <a:srgbClr val="F5EDE3"/>
         </a:solidFill>
         <a:effectLst/>
       </p:bgPr>
@@ -8202,7 +8202,7 @@
     <p:bg>
       <p:bgPr>
         <a:solidFill>
-          <a:srgbClr val="FFFFFF"/>
+          <a:srgbClr val="F5EDE3"/>
         </a:solidFill>
         <a:effectLst/>
       </p:bgPr>
@@ -9051,7 +9051,7 @@
     <p:bg>
       <p:bgPr>
         <a:solidFill>
-          <a:srgbClr val="FFFFFF"/>
+          <a:srgbClr val="F5EDE3"/>
         </a:solidFill>
         <a:effectLst/>
       </p:bgPr>
@@ -9857,7 +9857,7 @@
     <p:bg>
       <p:bgPr>
         <a:solidFill>
-          <a:srgbClr val="FFFFFF"/>
+          <a:srgbClr val="F5EDE3"/>
         </a:solidFill>
         <a:effectLst/>
       </p:bgPr>
@@ -10706,7 +10706,7 @@
     <p:bg>
       <p:bgPr>
         <a:solidFill>
-          <a:srgbClr val="FFFFFF"/>
+          <a:srgbClr val="F5EDE3"/>
         </a:solidFill>
         <a:effectLst/>
       </p:bgPr>
@@ -11512,7 +11512,7 @@
     <p:bg>
       <p:bgPr>
         <a:solidFill>
-          <a:srgbClr val="FFFFFF"/>
+          <a:srgbClr val="F5EDE3"/>
         </a:solidFill>
         <a:effectLst/>
       </p:bgPr>
@@ -12361,7 +12361,7 @@
     <p:bg>
       <p:bgPr>
         <a:solidFill>
-          <a:srgbClr val="FFFFFF"/>
+          <a:srgbClr val="F5EDE3"/>
         </a:solidFill>
         <a:effectLst/>
       </p:bgPr>
@@ -13099,7 +13099,7 @@
     <p:bg>
       <p:bgPr>
         <a:solidFill>
-          <a:srgbClr val="FFFFFF"/>
+          <a:srgbClr val="F5EDE3"/>
         </a:solidFill>
         <a:effectLst/>
       </p:bgPr>
@@ -13905,7 +13905,7 @@
     <p:bg>
       <p:bgPr>
         <a:solidFill>
-          <a:srgbClr val="FFFFFF"/>
+          <a:srgbClr val="F5EDE3"/>
         </a:solidFill>
         <a:effectLst/>
       </p:bgPr>
@@ -14754,7 +14754,7 @@
     <p:bg>
       <p:bgPr>
         <a:solidFill>
-          <a:srgbClr val="FFFFFF"/>
+          <a:srgbClr val="F5EDE3"/>
         </a:solidFill>
         <a:effectLst/>
       </p:bgPr>
@@ -15560,7 +15560,7 @@
     <p:bg>
       <p:bgPr>
         <a:solidFill>
-          <a:srgbClr val="FFFFFF"/>
+          <a:srgbClr val="F5EDE3"/>
         </a:solidFill>
         <a:effectLst/>
       </p:bgPr>
@@ -16409,7 +16409,7 @@
     <p:bg>
       <p:bgPr>
         <a:solidFill>
-          <a:srgbClr val="FFFFFF"/>
+          <a:srgbClr val="F5EDE3"/>
         </a:solidFill>
         <a:effectLst/>
       </p:bgPr>
@@ -17262,7 +17262,7 @@
     <p:bg>
       <p:bgPr>
         <a:solidFill>
-          <a:srgbClr val="FFFFFF"/>
+          <a:srgbClr val="F5EDE3"/>
         </a:solidFill>
         <a:effectLst/>
       </p:bgPr>
@@ -17937,7 +17937,7 @@
     <p:bg>
       <p:bgPr>
         <a:solidFill>
-          <a:srgbClr val="FFFFFF"/>
+          <a:srgbClr val="F5EDE3"/>
         </a:solidFill>
         <a:effectLst/>
       </p:bgPr>
@@ -18293,7 +18293,7 @@
     <p:bg>
       <p:bgPr>
         <a:solidFill>
-          <a:srgbClr val="FFFFFF"/>
+          <a:srgbClr val="F5EDE3"/>
         </a:solidFill>
         <a:effectLst/>
       </p:bgPr>
@@ -18789,7 +18789,7 @@
     <p:bg>
       <p:bgPr>
         <a:solidFill>
-          <a:srgbClr val="FFFFFF"/>
+          <a:srgbClr val="F5EDE3"/>
         </a:solidFill>
         <a:effectLst/>
       </p:bgPr>
@@ -19507,7 +19507,7 @@
     <p:bg>
       <p:bgPr>
         <a:solidFill>
-          <a:srgbClr val="FFFFFF"/>
+          <a:srgbClr val="F5EDE3"/>
         </a:solidFill>
         <a:effectLst/>
       </p:bgPr>
@@ -20090,7 +20090,7 @@
     <p:bg>
       <p:bgPr>
         <a:solidFill>
-          <a:srgbClr val="FFFFFF"/>
+          <a:srgbClr val="F5EDE3"/>
         </a:solidFill>
         <a:effectLst/>
       </p:bgPr>
@@ -20501,7 +20501,7 @@
     <p:bg>
       <p:bgPr>
         <a:solidFill>
-          <a:srgbClr val="FFFFFF"/>
+          <a:srgbClr val="F5EDE3"/>
         </a:solidFill>
         <a:effectLst/>
       </p:bgPr>
